--- a/files/deck-status.pptx
+++ b/files/deck-status.pptx
@@ -1323,7 +1323,7 @@
           <a:lstStyle/>
           <a:p>
             <a:pPr algn="r"/>
-            <a:fld id="{D0EDDD5A-7121-61AA-0550-194A753619A7}" type="slidenum">
+            <a:fld id="{7CE1844B-AD87-8D23-359B-D1A6872CC3F5}" type="slidenum">
               <a:rPr lang="en-US"/>
               <a:t>2</a:t>
             </a:fld>
@@ -1441,7 +1441,7 @@
           <a:lstStyle/>
           <a:p>
             <a:pPr algn="r"/>
-            <a:fld id="{C5AC5AE4-B740-62FD-249A-0282E36BD944}" type="slidenum">
+            <a:fld id="{567CC773-2778-EDCF-61AE-998A82D37B21}" type="slidenum">
               <a:rPr lang="en-US"/>
               <a:t>3</a:t>
             </a:fld>
@@ -1816,7 +1816,7 @@
           <a:lstStyle/>
           <a:p>
             <a:pPr algn="r"/>
-            <a:fld id="{F66845D5-0BDB-C295-C8B8-44A0CCAF3CE9}" type="slidenum">
+            <a:fld id="{69F44521-C40D-E211-4816-D3EB4E9A56F6}" type="slidenum">
               <a:rPr lang="en-US"/>
               <a:t>4</a:t>
             </a:fld>
@@ -1969,7 +1969,7 @@
           <a:lstStyle/>
           <a:p>
             <a:pPr algn="r"/>
-            <a:fld id="{2B501842-7F63-85C7-E6C0-5BFD7A176D17}" type="slidenum">
+            <a:fld id="{7F8F5C2E-2FFC-B612-138D-F8B97D7F2EDF}" type="slidenum">
               <a:rPr lang="en-US"/>
               <a:t>5</a:t>
             </a:fld>
@@ -2323,7 +2323,7 @@
           <a:lstStyle/>
           <a:p>
             <a:pPr algn="r"/>
-            <a:fld id="{CC20C230-4636-744F-E79A-CB5D0C1651F0}" type="slidenum">
+            <a:fld id="{D6EC829B-AE18-4B8A-67BA-03C89E91CA6A}" type="slidenum">
               <a:rPr lang="en-US"/>
               <a:t>6</a:t>
             </a:fld>
@@ -2444,7 +2444,7 @@
           <a:lstStyle/>
           <a:p>
             <a:pPr algn="r"/>
-            <a:fld id="{7E58036B-C437-5ABB-41A7-94192E1A860C}" type="slidenum">
+            <a:fld id="{727CC234-4799-0F94-FB74-04FB3F91EE13}" type="slidenum">
               <a:rPr lang="en-US"/>
               <a:t>7</a:t>
             </a:fld>
